--- a/個別相談/テンプレート/JLINE_PERSONAL_提案資料_テンプレート.pptx
+++ b/個別相談/テンプレート/JLINE_PERSONAL_提案資料_テンプレート.pptx
@@ -10970,7 +10970,7 @@
                 <a:latin typeface="Noto Sans JP"/>
                 <a:ea typeface="Noto Sans JP"/>
               </a:rPr>
-              <a:t>共通　｜　はじめにセットアップミーティング（保護者の方のみ・30分）　／　週次チェックイン　／　Chatwork（24時間以内）</a:t>
+              <a:t>共通　｜　はじめにセットアップミーティング（保護者の方・30分／お子様の同席も可）　／　週次チェックイン　／　Chatwork（24時間以内）</a:t>
             </a:r>
           </a:p>
           <a:p>
